--- a/assets/pptx/catalog-302.pptx
+++ b/assets/pptx/catalog-302.pptx
@@ -3387,7 +3387,7 @@
                 <a:ea typeface="Ebrima"/>
                 <a:cs typeface="Ebrima"/>
               </a:rPr>
-              <a:t>መኖር ማይገባኝ ባሪያ ነበርኩ (2x)</a:t>
+              <a:t>መኖር ማይገባኝ ባሪያ ነበርኩ 2x</a:t>
             </a:r>
           </a:p>
         </p:txBody>
@@ -3508,7 +3508,7 @@
                 <a:ea typeface="Ebrima"/>
                 <a:cs typeface="Ebrima"/>
               </a:rPr>
-              <a:t>በማይጠፋው ፍቅርህ ለወጥከኝ (2x)</a:t>
+              <a:t>በማይጠፋው ፍቅርህ ለወጥከኝ 2x</a:t>
             </a:r>
           </a:p>
         </p:txBody>
@@ -3696,7 +3696,7 @@
                 <a:ea typeface="Ebrima"/>
                 <a:cs typeface="Ebrima"/>
               </a:rPr>
-              <a:t>መኖር ማይገባኝ ባሪያ ነበርኩ (2x)</a:t>
+              <a:t>መኖር ማይገባኝ ባሪያ ነበርኩ 2x</a:t>
             </a:r>
           </a:p>
         </p:txBody>
@@ -3817,7 +3817,7 @@
                 <a:ea typeface="Ebrima"/>
                 <a:cs typeface="Ebrima"/>
               </a:rPr>
-              <a:t>በማይጠፋው ፍቅርህ ለወጥከኝ (2x)</a:t>
+              <a:t>በማይጠፋው ፍቅርህ ለወጥከኝ 2x</a:t>
             </a:r>
           </a:p>
         </p:txBody>
@@ -3938,7 +3938,7 @@
                 <a:ea typeface="Ebrima"/>
                 <a:cs typeface="Ebrima"/>
               </a:rPr>
-              <a:t>ሕያው ሆንኩኝ በኢየሱሴ (2x)</a:t>
+              <a:t>ሕያው ሆንኩኝ በኢየሱሴ 2x</a:t>
             </a:r>
           </a:p>
         </p:txBody>
@@ -4059,7 +4059,7 @@
                 <a:ea typeface="Ebrima"/>
                 <a:cs typeface="Ebrima"/>
               </a:rPr>
-              <a:t>በማይጠፋው ፍቅርህ ለወጥከኝ (2x)</a:t>
+              <a:t>በማይጠፋው ፍቅርህ ለወጥከኝ 2x</a:t>
             </a:r>
           </a:p>
         </p:txBody>
